--- a/public/program-kz.pptx
+++ b/public/program-kz.pptx
@@ -2,15 +2,15 @@
 <file path=ppt/presentation.xml><?xml version="1.0" encoding="utf-8"?>
 <p:presentation xmlns:a="http://schemas.openxmlformats.org/drawingml/2006/main" xmlns:r="http://schemas.openxmlformats.org/officeDocument/2006/relationships" xmlns:p="http://schemas.openxmlformats.org/presentationml/2006/main">
   <p:sldMasterIdLst>
-    <p:sldMasterId id="2147483648" r:id="rId1"/>
+    <p:sldMasterId id="2147483648" r:id="rId4"/>
   </p:sldMasterIdLst>
   <p:handoutMasterIdLst>
-    <p:handoutMasterId r:id="rId5"/>
+    <p:handoutMasterId r:id="rId8"/>
   </p:handoutMasterIdLst>
   <p:sldIdLst>
-    <p:sldId id="261" r:id="rId2"/>
-    <p:sldId id="263" r:id="rId3"/>
-    <p:sldId id="264" r:id="rId4"/>
+    <p:sldId id="261" r:id="rId5"/>
+    <p:sldId id="263" r:id="rId6"/>
+    <p:sldId id="264" r:id="rId7"/>
   </p:sldIdLst>
   <p:sldSz cx="7569200" cy="10699750"/>
   <p:notesSz cx="7569200" cy="10699750"/>
@@ -39,6 +39,14 @@
     </p:ext>
   </p:extLst>
 </p:presentation>
+</file>
+
+<file path=ppt/revisionInfo.xml><?xml version="1.0" encoding="utf-8"?>
+<p1510:revInfo xmlns:a="http://schemas.openxmlformats.org/drawingml/2006/main" xmlns:r="http://schemas.openxmlformats.org/officeDocument/2006/relationships" xmlns:p1510="http://schemas.microsoft.com/office/powerpoint/2015/10/main">
+  <p1510:revLst>
+    <p1510:client id="{D1477FC7-D685-9149-16DA-623F433466C3}" v="13" dt="2026-03-31T09:04:47.882"/>
+  </p1510:revLst>
+</p1510:revInfo>
 </file>
 
 <file path=ppt/handoutMasters/handoutMaster1.xml><?xml version="1.0" encoding="utf-8"?>
@@ -135,7 +143,7 @@
           <a:p>
             <a:fld id="{0C391B6F-BBFA-438A-9286-1FC62C3499A0}" type="datetimeFigureOut">
               <a:rPr lang="ru-RU" smtClean="0"/>
-              <a:t>18.03.2026</a:t>
+              <a:t>01.04.2026</a:t>
             </a:fld>
             <a:endParaRPr lang="ru-RU"/>
           </a:p>
@@ -379,7 +387,7 @@
           <a:p>
             <a:fld id="{1D8BD707-D9CF-40AE-B4C6-C98DA3205C09}" type="datetimeFigureOut">
               <a:rPr lang="en-US"/>
-              <a:t>3/18/2026</a:t>
+              <a:t>4/1/2026</a:t>
             </a:fld>
             <a:endParaRPr lang="en-US"/>
           </a:p>
@@ -822,7 +830,7 @@
           <a:p>
             <a:fld id="{1D8BD707-D9CF-40AE-B4C6-C98DA3205C09}" type="datetimeFigureOut">
               <a:rPr lang="en-US"/>
-              <a:t>3/18/2026</a:t>
+              <a:t>4/1/2026</a:t>
             </a:fld>
             <a:endParaRPr lang="en-US"/>
           </a:p>
@@ -1036,7 +1044,7 @@
           <a:p>
             <a:fld id="{1D8BD707-D9CF-40AE-B4C6-C98DA3205C09}" type="datetimeFigureOut">
               <a:rPr lang="en-US"/>
-              <a:t>3/18/2026</a:t>
+              <a:t>4/1/2026</a:t>
             </a:fld>
             <a:endParaRPr lang="en-US"/>
           </a:p>
@@ -1184,7 +1192,7 @@
           <a:p>
             <a:fld id="{1D8BD707-D9CF-40AE-B4C6-C98DA3205C09}" type="datetimeFigureOut">
               <a:rPr lang="en-US"/>
-              <a:t>3/18/2026</a:t>
+              <a:t>4/1/2026</a:t>
             </a:fld>
             <a:endParaRPr lang="en-US"/>
           </a:p>
@@ -1383,7 +1391,7 @@
           <a:p>
             <a:fld id="{1D8BD707-D9CF-40AE-B4C6-C98DA3205C09}" type="datetimeFigureOut">
               <a:rPr lang="en-US"/>
-              <a:t>3/18/2026</a:t>
+              <a:t>4/1/2026</a:t>
             </a:fld>
             <a:endParaRPr lang="en-US"/>
           </a:p>
@@ -1606,7 +1614,7 @@
           <a:p>
             <a:fld id="{1D8BD707-D9CF-40AE-B4C6-C98DA3205C09}" type="datetimeFigureOut">
               <a:rPr lang="en-US"/>
-              <a:t>3/18/2026</a:t>
+              <a:t>4/1/2026</a:t>
             </a:fld>
             <a:endParaRPr lang="en-US"/>
           </a:p>
@@ -1906,8 +1914,8 @@
         </p:blipFill>
         <p:spPr bwMode="auto">
           <a:xfrm>
-            <a:off x="5688426" y="101418"/>
-            <a:ext cx="1613204" cy="1023984"/>
+            <a:off x="5688414" y="115799"/>
+            <a:ext cx="1570034" cy="851408"/>
           </a:xfrm>
           <a:prstGeom prst="rect">
             <a:avLst/>
@@ -2621,7 +2629,29 @@
                 <a:ea typeface="Roboto" panose="02000000000000000000" pitchFamily="2" charset="0"/>
                 <a:cs typeface="Arial" panose="020B0604020202020204" pitchFamily="34" charset="0"/>
               </a:rPr>
-              <a:t>әріптестері</a:t>
+              <a:t>қоса </a:t>
+            </a:r>
+            <a:r>
+              <a:rPr lang="kk-KZ" sz="1600" dirty="0">
+                <a:solidFill>
+                  <a:srgbClr val="002060"/>
+                </a:solidFill>
+                <a:latin typeface="Arial" panose="020B0604020202020204" pitchFamily="34" charset="0"/>
+                <a:ea typeface="Roboto" panose="02000000000000000000" pitchFamily="2" charset="0"/>
+                <a:cs typeface="Arial" panose="020B0604020202020204" pitchFamily="34" charset="0"/>
+              </a:rPr>
+              <a:t>ұйымдастырылған</a:t>
+            </a:r>
+            <a:r>
+              <a:rPr sz="1600" spc="-20" dirty="0">
+                <a:solidFill>
+                  <a:srgbClr val="002060"/>
+                </a:solidFill>
+                <a:latin typeface="Arial" panose="020B0604020202020204" pitchFamily="34" charset="0"/>
+                <a:ea typeface="Roboto" panose="02000000000000000000" pitchFamily="2" charset="0"/>
+                <a:cs typeface="Arial" panose="020B0604020202020204" pitchFamily="34" charset="0"/>
+              </a:rPr>
+              <a:t> </a:t>
             </a:r>
             <a:endParaRPr sz="1600" dirty="0">
               <a:solidFill>
@@ -2724,27 +2754,7 @@
               </a:spcBef>
             </a:pPr>
             <a:r>
-              <a:rPr lang="en-US" sz="1200" dirty="0">
-                <a:solidFill>
-                  <a:schemeClr val="bg1"/>
-                </a:solidFill>
-                <a:latin typeface="Century Gothic" panose="020B0502020202020204" pitchFamily="34" charset="0"/>
-                <a:cs typeface="Calibri"/>
-              </a:rPr>
-              <a:t> </a:t>
-            </a:r>
-            <a:r>
-              <a:rPr lang="en-US" sz="1200" dirty="0" err="1">
-                <a:solidFill>
-                  <a:schemeClr val="bg1"/>
-                </a:solidFill>
-                <a:latin typeface="Century Gothic" panose="020B0502020202020204" pitchFamily="34" charset="0"/>
-                <a:cs typeface="Calibri"/>
-              </a:rPr>
-              <a:t>s.bolatkyzy</a:t>
-            </a:r>
-            <a:r>
-              <a:rPr lang="de-DE" sz="1200" spc="-10" dirty="0">
+              <a:rPr lang="de-DE" sz="1200" spc="-10" dirty="0" err="1">
                 <a:solidFill>
                   <a:schemeClr val="bg1"/>
                 </a:solidFill>
@@ -2752,6 +2762,24 @@
                 <a:ea typeface="Roboto" panose="02000000000000000000" pitchFamily="2" charset="0"/>
                 <a:cs typeface="Roboto" panose="02000000000000000000" pitchFamily="2" charset="0"/>
                 <a:hlinkClick r:id="rId3">
+                  <a:extLst>
+                    <a:ext uri="{A12FA001-AC4F-418D-AE19-62706E023703}">
+                      <ahyp:hlinkClr xmlns:ahyp="http://schemas.microsoft.com/office/drawing/2018/hyperlinkcolor" val="tx"/>
+                    </a:ext>
+                  </a:extLst>
+                </a:hlinkClick>
+              </a:rPr>
+              <a:t>s.bolatkyzy</a:t>
+            </a:r>
+            <a:r>
+              <a:rPr lang="de-DE" sz="1200" spc="-10" dirty="0" err="1">
+                <a:solidFill>
+                  <a:schemeClr val="bg1"/>
+                </a:solidFill>
+                <a:latin typeface="Century Gothic" panose="020B0502020202020204" pitchFamily="34" charset="0"/>
+                <a:ea typeface="Roboto" panose="02000000000000000000" pitchFamily="2" charset="0"/>
+                <a:cs typeface="Roboto" panose="02000000000000000000" pitchFamily="2" charset="0"/>
+                <a:hlinkClick r:id="rId4">
                   <a:extLst>
                     <a:ext uri="{A12FA001-AC4F-418D-AE19-62706E023703}">
                       <ahyp:hlinkClr xmlns:ahyp="http://schemas.microsoft.com/office/drawing/2018/hyperlinkcolor" val="tx"/>
@@ -3049,8 +3077,8 @@
         </p:nvSpPr>
         <p:spPr>
           <a:xfrm>
-            <a:off x="316231" y="7565290"/>
-            <a:ext cx="3312464" cy="1185581"/>
+            <a:off x="701979" y="7565290"/>
+            <a:ext cx="2926715" cy="1185581"/>
           </a:xfrm>
           <a:prstGeom prst="rect">
             <a:avLst/>
@@ -3116,7 +3144,29 @@
                 <a:ea typeface="Roboto" panose="02000000000000000000" pitchFamily="2" charset="0"/>
                 <a:cs typeface="Arial" panose="020B0604020202020204" pitchFamily="34" charset="0"/>
               </a:rPr>
-              <a:t>ашылуы</a:t>
+              <a:t>ашылу</a:t>
+            </a:r>
+            <a:r>
+              <a:rPr lang="ru-RU" sz="1200" spc="-10" dirty="0">
+                <a:solidFill>
+                  <a:srgbClr val="FFFFFF"/>
+                </a:solidFill>
+                <a:latin typeface="Arial" panose="020B0604020202020204" pitchFamily="34" charset="0"/>
+                <a:ea typeface="Roboto" panose="02000000000000000000" pitchFamily="2" charset="0"/>
+                <a:cs typeface="Arial" panose="020B0604020202020204" pitchFamily="34" charset="0"/>
+              </a:rPr>
+              <a:t> </a:t>
+            </a:r>
+            <a:r>
+              <a:rPr lang="ru-RU" sz="1200" spc="-10" dirty="0" err="1">
+                <a:solidFill>
+                  <a:srgbClr val="FFFFFF"/>
+                </a:solidFill>
+                <a:latin typeface="Arial" panose="020B0604020202020204" pitchFamily="34" charset="0"/>
+                <a:ea typeface="Roboto" panose="02000000000000000000" pitchFamily="2" charset="0"/>
+                <a:cs typeface="Arial" panose="020B0604020202020204" pitchFamily="34" charset="0"/>
+              </a:rPr>
+              <a:t>сөзі</a:t>
             </a:r>
             <a:endParaRPr lang="ru-RU" sz="1200" spc="-10" dirty="0">
               <a:solidFill>
@@ -3423,14 +3473,14 @@
           <p:nvPr/>
         </p:nvPicPr>
         <p:blipFill>
-          <a:blip r:embed="rId4"/>
+          <a:blip r:embed="rId5"/>
           <a:stretch>
             <a:fillRect/>
           </a:stretch>
         </p:blipFill>
         <p:spPr>
           <a:xfrm>
-            <a:off x="4518271" y="5435393"/>
+            <a:off x="3423424" y="5804689"/>
             <a:ext cx="2179213" cy="871685"/>
           </a:xfrm>
           <a:prstGeom prst="rect">
@@ -3474,27 +3524,7 @@
               </a:spcBef>
             </a:pPr>
             <a:r>
-              <a:rPr lang="en-US" sz="1200" dirty="0">
-                <a:solidFill>
-                  <a:schemeClr val="bg1"/>
-                </a:solidFill>
-                <a:latin typeface="Century Gothic" panose="020B0502020202020204" pitchFamily="34" charset="0"/>
-                <a:cs typeface="Calibri"/>
-              </a:rPr>
-              <a:t> </a:t>
-            </a:r>
-            <a:r>
-              <a:rPr lang="en-US" sz="1200" dirty="0" err="1">
-                <a:solidFill>
-                  <a:schemeClr val="bg1"/>
-                </a:solidFill>
-                <a:latin typeface="Century Gothic" panose="020B0502020202020204" pitchFamily="34" charset="0"/>
-                <a:cs typeface="Calibri"/>
-              </a:rPr>
-              <a:t>s.bolatkyzy</a:t>
-            </a:r>
-            <a:r>
-              <a:rPr lang="de-DE" sz="1200" spc="-10" dirty="0">
+              <a:rPr lang="de-DE" sz="1200" spc="-10" dirty="0" err="1">
                 <a:solidFill>
                   <a:schemeClr val="bg1"/>
                 </a:solidFill>
@@ -3502,6 +3532,24 @@
                 <a:ea typeface="Roboto" panose="02000000000000000000" pitchFamily="2" charset="0"/>
                 <a:cs typeface="Roboto" panose="02000000000000000000" pitchFamily="2" charset="0"/>
                 <a:hlinkClick r:id="rId3">
+                  <a:extLst>
+                    <a:ext uri="{A12FA001-AC4F-418D-AE19-62706E023703}">
+                      <ahyp:hlinkClr xmlns:ahyp="http://schemas.microsoft.com/office/drawing/2018/hyperlinkcolor" val="tx"/>
+                    </a:ext>
+                  </a:extLst>
+                </a:hlinkClick>
+              </a:rPr>
+              <a:t>s.bolatkyzy</a:t>
+            </a:r>
+            <a:r>
+              <a:rPr lang="de-DE" sz="1200" spc="-10" dirty="0" err="1">
+                <a:solidFill>
+                  <a:schemeClr val="bg1"/>
+                </a:solidFill>
+                <a:latin typeface="Century Gothic" panose="020B0502020202020204" pitchFamily="34" charset="0"/>
+                <a:ea typeface="Roboto" panose="02000000000000000000" pitchFamily="2" charset="0"/>
+                <a:cs typeface="Roboto" panose="02000000000000000000" pitchFamily="2" charset="0"/>
+                <a:hlinkClick r:id="rId4">
                   <a:extLst>
                     <a:ext uri="{A12FA001-AC4F-418D-AE19-62706E023703}">
                       <ahyp:hlinkClr xmlns:ahyp="http://schemas.microsoft.com/office/drawing/2018/hyperlinkcolor" val="tx"/>
@@ -3537,7 +3585,7 @@
           <p:nvPr/>
         </p:nvPicPr>
         <p:blipFill>
-          <a:blip r:embed="rId5" cstate="print">
+          <a:blip r:embed="rId6" cstate="print">
             <a:extLst>
               <a:ext uri="{28A0092B-C50C-407E-A947-70E740481C1C}">
                 <a14:useLocalDpi xmlns:a14="http://schemas.microsoft.com/office/drawing/2010/main" val="0"/>
@@ -3551,8 +3599,8 @@
         </p:blipFill>
         <p:spPr bwMode="auto">
           <a:xfrm>
-            <a:off x="928879" y="5616124"/>
-            <a:ext cx="1390929" cy="1240160"/>
+            <a:off x="2072764" y="5849199"/>
+            <a:ext cx="866955" cy="772982"/>
           </a:xfrm>
           <a:prstGeom prst="rect">
             <a:avLst/>
@@ -3672,78 +3720,6 @@
       </p:sp>
       <p:pic>
         <p:nvPicPr>
-          <p:cNvPr id="19" name="Рисунок 18" descr="Изображение выглядит как Графика, Шрифт, графический дизайн, снимок экрана  Автоматически созданное описание">
-            <a:extLst>
-              <a:ext uri="{FF2B5EF4-FFF2-40B4-BE49-F238E27FC236}">
-                <a16:creationId xmlns:a16="http://schemas.microsoft.com/office/drawing/2014/main" id="{8F33752A-5400-C3BA-1FAC-339A0CEBA65F}"/>
-              </a:ext>
-            </a:extLst>
-          </p:cNvPr>
-          <p:cNvPicPr>
-            <a:picLocks noChangeAspect="1"/>
-          </p:cNvPicPr>
-          <p:nvPr/>
-        </p:nvPicPr>
-        <p:blipFill>
-          <a:blip r:embed="rId6" cstate="print">
-            <a:extLst>
-              <a:ext uri="{28A0092B-C50C-407E-A947-70E740481C1C}">
-                <a14:useLocalDpi xmlns:a14="http://schemas.microsoft.com/office/drawing/2010/main" val="0"/>
-              </a:ext>
-            </a:extLst>
-          </a:blip>
-          <a:stretch>
-            <a:fillRect/>
-          </a:stretch>
-        </p:blipFill>
-        <p:spPr>
-          <a:xfrm>
-            <a:off x="2934245" y="5613689"/>
-            <a:ext cx="1155408" cy="544293"/>
-          </a:xfrm>
-          <a:prstGeom prst="rect">
-            <a:avLst/>
-          </a:prstGeom>
-        </p:spPr>
-      </p:pic>
-      <p:pic>
-        <p:nvPicPr>
-          <p:cNvPr id="21" name="Рисунок 20" descr="Изображение выглядит как текст, графический дизайн, Графика, Шрифт  Автоматически созданное описание">
-            <a:extLst>
-              <a:ext uri="{FF2B5EF4-FFF2-40B4-BE49-F238E27FC236}">
-                <a16:creationId xmlns:a16="http://schemas.microsoft.com/office/drawing/2014/main" id="{8213D2C3-7A38-6D32-9379-3BE386688FEC}"/>
-              </a:ext>
-            </a:extLst>
-          </p:cNvPr>
-          <p:cNvPicPr>
-            <a:picLocks noChangeAspect="1"/>
-          </p:cNvPicPr>
-          <p:nvPr/>
-        </p:nvPicPr>
-        <p:blipFill>
-          <a:blip r:embed="rId7" cstate="print">
-            <a:extLst>
-              <a:ext uri="{28A0092B-C50C-407E-A947-70E740481C1C}">
-                <a14:useLocalDpi xmlns:a14="http://schemas.microsoft.com/office/drawing/2010/main" val="0"/>
-              </a:ext>
-            </a:extLst>
-          </a:blip>
-          <a:stretch>
-            <a:fillRect/>
-          </a:stretch>
-        </p:blipFill>
-        <p:spPr>
-          <a:xfrm>
-            <a:off x="2712418" y="6299274"/>
-            <a:ext cx="2895237" cy="1063688"/>
-          </a:xfrm>
-          <a:prstGeom prst="rect">
-            <a:avLst/>
-          </a:prstGeom>
-        </p:spPr>
-      </p:pic>
-      <p:pic>
-        <p:nvPicPr>
           <p:cNvPr id="22" name="Рисунок 21" descr="Изображение выглядит как Графика, Шрифт, графический дизайн, снимок экрана  Автоматически созданное описание">
             <a:extLst>
               <a:ext uri="{FF2B5EF4-FFF2-40B4-BE49-F238E27FC236}">
@@ -3757,7 +3733,7 @@
           <p:nvPr/>
         </p:nvPicPr>
         <p:blipFill>
-          <a:blip r:embed="rId8" cstate="print">
+          <a:blip r:embed="rId7" cstate="print">
             <a:extLst>
               <a:ext uri="{28A0092B-C50C-407E-A947-70E740481C1C}">
                 <a14:useLocalDpi xmlns:a14="http://schemas.microsoft.com/office/drawing/2010/main" val="0"/>
@@ -3791,7 +3767,7 @@
           <p:nvPr/>
         </p:nvPicPr>
         <p:blipFill>
-          <a:blip r:embed="rId9" cstate="print">
+          <a:blip r:embed="rId8" cstate="print">
             <a:extLst>
               <a:ext uri="{28A0092B-C50C-407E-A947-70E740481C1C}">
                 <a14:useLocalDpi xmlns:a14="http://schemas.microsoft.com/office/drawing/2010/main" val="0"/>
@@ -3806,6 +3782,42 @@
           <a:xfrm>
             <a:off x="0" y="36000"/>
             <a:ext cx="316230" cy="179705"/>
+          </a:xfrm>
+          <a:prstGeom prst="rect">
+            <a:avLst/>
+          </a:prstGeom>
+        </p:spPr>
+      </p:pic>
+      <p:pic>
+        <p:nvPicPr>
+          <p:cNvPr id="11" name="Picture 10">
+            <a:extLst>
+              <a:ext uri="{FF2B5EF4-FFF2-40B4-BE49-F238E27FC236}">
+                <a16:creationId xmlns:a16="http://schemas.microsoft.com/office/drawing/2014/main" id="{BC43243E-8627-4D5F-3FA8-7B2E5F7FADE0}"/>
+              </a:ext>
+            </a:extLst>
+          </p:cNvPr>
+          <p:cNvPicPr>
+            <a:picLocks noChangeAspect="1"/>
+          </p:cNvPicPr>
+          <p:nvPr/>
+        </p:nvPicPr>
+        <p:blipFill>
+          <a:blip r:embed="rId9" cstate="print">
+            <a:extLst>
+              <a:ext uri="{28A0092B-C50C-407E-A947-70E740481C1C}">
+                <a14:useLocalDpi xmlns:a14="http://schemas.microsoft.com/office/drawing/2010/main" val="0"/>
+              </a:ext>
+            </a:extLst>
+          </a:blip>
+          <a:stretch>
+            <a:fillRect/>
+          </a:stretch>
+        </p:blipFill>
+        <p:spPr>
+          <a:xfrm>
+            <a:off x="1783737" y="171538"/>
+            <a:ext cx="2307257" cy="848143"/>
           </a:xfrm>
           <a:prstGeom prst="rect">
             <a:avLst/>
@@ -4058,7 +4070,7 @@
                 <a:latin typeface="Arial" panose="020B0604020202020204" pitchFamily="34" charset="0"/>
                 <a:cs typeface="Arial" panose="020B0604020202020204" pitchFamily="34" charset="0"/>
               </a:rPr>
-              <a:t>Біз Сіздерді форум қатысушыларының қатарында көруге қуаныштымыз және көлік пен логистика саласындағы халықаралық ынтымақтастықты дамытуға белсенді қатысасыздар деп сенім білдіреміз.</a:t>
+              <a:t>Біз Сіздерді форум қатысушыларының қатарында көруге қуаныштымыз және көлік пен логистика саласындағы халықаралық ынтымақтастықты дамытуға белсенді қатысуыңызға сенім білдіреміз.</a:t>
             </a:r>
           </a:p>
           <a:p>
@@ -4081,22 +4093,30 @@
               <a:t>Қосымша ақпарат алу үшін келесі байланыс арқылы хабарласуыңызға болады</a:t>
             </a:r>
             <a:r>
-              <a:rPr lang="en-US" sz="1400" dirty="0">
-                <a:solidFill>
-                  <a:schemeClr val="bg1"/>
+              <a:rPr lang="kk-KZ" sz="1300" spc="-20" noProof="0" dirty="0">
+                <a:solidFill>
+                  <a:schemeClr val="accent1"/>
+                </a:solidFill>
+                <a:latin typeface="Arial" panose="020B0604020202020204" pitchFamily="34" charset="0"/>
+                <a:cs typeface="Arial" panose="020B0604020202020204" pitchFamily="34" charset="0"/>
+              </a:rPr>
+              <a:t>:</a:t>
+            </a:r>
+            <a:r>
+              <a:rPr lang="de-DE" sz="1400" spc="-10" dirty="0" err="1">
+                <a:solidFill>
+                  <a:schemeClr val="accent1"/>
                 </a:solidFill>
                 <a:latin typeface="Century Gothic" panose="020B0502020202020204" pitchFamily="34" charset="0"/>
-                <a:cs typeface="Calibri"/>
-              </a:rPr>
-              <a:t> </a:t>
-            </a:r>
-            <a:r>
-              <a:rPr lang="en-US" sz="1200" dirty="0" err="1">
-                <a:solidFill>
-                  <a:srgbClr val="022868"/>
-                </a:solidFill>
-                <a:latin typeface="Century Gothic" panose="020B0502020202020204" pitchFamily="34" charset="0"/>
-                <a:cs typeface="Calibri"/>
+                <a:ea typeface="Roboto" panose="02000000000000000000" pitchFamily="2" charset="0"/>
+                <a:cs typeface="Roboto" panose="02000000000000000000" pitchFamily="2" charset="0"/>
+                <a:hlinkClick r:id="rId3">
+                  <a:extLst>
+                    <a:ext uri="{A12FA001-AC4F-418D-AE19-62706E023703}">
+                      <ahyp:hlinkClr xmlns:ahyp="http://schemas.microsoft.com/office/drawing/2018/hyperlinkcolor" val="tx"/>
+                    </a:ext>
+                  </a:extLst>
+                </a:hlinkClick>
               </a:rPr>
               <a:t>s.bolatkyzy</a:t>
             </a:r>
@@ -4339,7 +4359,7 @@
           <p:nvPr/>
         </p:nvPicPr>
         <p:blipFill>
-          <a:blip r:embed="rId3" cstate="print">
+          <a:blip r:embed="rId4" cstate="print">
             <a:extLst>
               <a:ext uri="{28A0092B-C50C-407E-A947-70E740481C1C}">
                 <a14:useLocalDpi xmlns:a14="http://schemas.microsoft.com/office/drawing/2010/main" val="0"/>
@@ -5098,10 +5118,20 @@
                 <a:latin typeface="Arial" panose="020B0604020202020204" pitchFamily="34" charset="0"/>
                 <a:cs typeface="Arial" panose="020B0604020202020204" pitchFamily="34" charset="0"/>
               </a:rPr>
-              <a:t>Қазақстандық және неміс компаниялары мен </a:t>
-            </a:r>
-            <a:r>
-              <a:rPr lang="kk-KZ" sz="1100" u="sng" spc="-10" noProof="0">
+              <a:t>Қазақстандық және неміс компаниялары мен ұйымдарының өкілдері (Kazakhstan Temir Zholy, Eastcomtrans, AsstrA, Gebrüder Weiss және т.б. )</a:t>
+            </a:r>
+          </a:p>
+          <a:p>
+            <a:pPr marL="12700" algn="l" rtl="0">
+              <a:lnSpc>
+                <a:spcPct val="100000"/>
+              </a:lnSpc>
+              <a:spcBef>
+                <a:spcPts val="625"/>
+              </a:spcBef>
+            </a:pPr>
+            <a:r>
+              <a:rPr lang="kk-KZ" sz="1100" u="sng" spc="-10" noProof="0" dirty="0">
                 <a:solidFill>
                   <a:srgbClr val="002060"/>
                 </a:solidFill>
@@ -5113,47 +5143,7 @@
                 <a:latin typeface="Arial" panose="020B0604020202020204" pitchFamily="34" charset="0"/>
                 <a:cs typeface="Arial" panose="020B0604020202020204" pitchFamily="34" charset="0"/>
               </a:rPr>
-              <a:t>ұйымдарының өкілдері</a:t>
-            </a:r>
-          </a:p>
-          <a:p>
-            <a:pPr marL="358775" algn="l" rtl="0">
-              <a:lnSpc>
-                <a:spcPct val="100000"/>
-              </a:lnSpc>
-              <a:spcBef>
-                <a:spcPts val="625"/>
-              </a:spcBef>
-            </a:pPr>
-            <a:r>
-              <a:rPr lang="kk-KZ" sz="1100" u="sng" spc="-10" noProof="0">
-                <a:solidFill>
-                  <a:srgbClr val="002060"/>
-                </a:solidFill>
-                <a:uFill>
-                  <a:solidFill>
-                    <a:srgbClr val="39A0D2"/>
-                  </a:solidFill>
-                </a:uFill>
-                <a:latin typeface="Arial" panose="020B0604020202020204" pitchFamily="34" charset="0"/>
-                <a:cs typeface="Arial" panose="020B0604020202020204" pitchFamily="34" charset="0"/>
-              </a:rPr>
-              <a:t>13:00 </a:t>
-            </a:r>
-            <a:r>
-              <a:rPr lang="kk-KZ" sz="1100" u="sng" spc="-10" noProof="0" dirty="0">
-                <a:solidFill>
-                  <a:srgbClr val="002060"/>
-                </a:solidFill>
-                <a:uFill>
-                  <a:solidFill>
-                    <a:srgbClr val="39A0D2"/>
-                  </a:solidFill>
-                </a:uFill>
-                <a:latin typeface="Arial" panose="020B0604020202020204" pitchFamily="34" charset="0"/>
-                <a:cs typeface="Arial" panose="020B0604020202020204" pitchFamily="34" charset="0"/>
-              </a:rPr>
-              <a:t>– 14:30 </a:t>
+              <a:t>13:00 – 14:30 </a:t>
             </a:r>
             <a:r>
               <a:rPr lang="kk-KZ" sz="1100" b="1" u="sng" spc="-10" noProof="0" dirty="0">
@@ -5338,7 +5328,7 @@
                 <a:latin typeface="Arial" panose="020B0604020202020204" pitchFamily="34" charset="0"/>
                 <a:cs typeface="Arial" panose="020B0604020202020204" pitchFamily="34" charset="0"/>
               </a:rPr>
-              <a:t>қабылдау (Paulaner Bräuhaus Almaty)</a:t>
+              <a:t>қабылдау </a:t>
             </a:r>
           </a:p>
           <a:p>
@@ -6115,4 +6105,309 @@
     </a:ext>
   </a:extLst>
 </a:theme>
+</file>
+
+<file path=customXml/item1.xml><?xml version="1.0" encoding="utf-8"?>
+<ct:contentTypeSchema xmlns:ct="http://schemas.microsoft.com/office/2006/metadata/contentType" xmlns:ma="http://schemas.microsoft.com/office/2006/metadata/properties/metaAttributes" ct:_="" ma:_="" ma:contentTypeName="Dokument" ma:contentTypeID="0x0101004840DA7A1AA00843BF7BE267E1CB408D" ma:contentTypeVersion="16" ma:contentTypeDescription="Ein neues Dokument erstellen." ma:contentTypeScope="" ma:versionID="cf8e11fa954ad01a02db4d0e36146d6b">
+  <xsd:schema xmlns:xsd="http://www.w3.org/2001/XMLSchema" xmlns:xs="http://www.w3.org/2001/XMLSchema" xmlns:p="http://schemas.microsoft.com/office/2006/metadata/properties" xmlns:ns2="dd447142-1aa6-4a72-a007-63df8aaaa9f8" xmlns:ns3="c945b90e-fc88-49af-b28e-2201e397b9a1" targetNamespace="http://schemas.microsoft.com/office/2006/metadata/properties" ma:root="true" ma:fieldsID="1462049e7e9ba608de639a380a24340d" ns2:_="" ns3:_="">
+    <xsd:import namespace="dd447142-1aa6-4a72-a007-63df8aaaa9f8"/>
+    <xsd:import namespace="c945b90e-fc88-49af-b28e-2201e397b9a1"/>
+    <xsd:element name="properties">
+      <xsd:complexType>
+        <xsd:sequence>
+          <xsd:element name="documentManagement">
+            <xsd:complexType>
+              <xsd:all>
+                <xsd:element ref="ns2:MediaServiceMetadata" minOccurs="0"/>
+                <xsd:element ref="ns2:MediaServiceFastMetadata" minOccurs="0"/>
+                <xsd:element ref="ns2:MediaServiceObjectDetectorVersions" minOccurs="0"/>
+                <xsd:element ref="ns3:SharedWithUsers" minOccurs="0"/>
+                <xsd:element ref="ns3:SharedWithDetails" minOccurs="0"/>
+                <xsd:element ref="ns2:MediaServiceDateTaken" minOccurs="0"/>
+                <xsd:element ref="ns2:MediaServiceGenerationTime" minOccurs="0"/>
+                <xsd:element ref="ns2:MediaServiceEventHashCode" minOccurs="0"/>
+                <xsd:element ref="ns2:MediaLengthInSeconds" minOccurs="0"/>
+                <xsd:element ref="ns2:lcf76f155ced4ddcb4097134ff3c332f" minOccurs="0"/>
+                <xsd:element ref="ns3:TaxCatchAll" minOccurs="0"/>
+                <xsd:element ref="ns2:MediaServiceOCR" minOccurs="0"/>
+                <xsd:element ref="ns2:MediaServiceSearchProperties" minOccurs="0"/>
+                <xsd:element ref="ns2:MediaServiceLocation" minOccurs="0"/>
+                <xsd:element ref="ns2:MediaServiceBillingMetadata" minOccurs="0"/>
+              </xsd:all>
+            </xsd:complexType>
+          </xsd:element>
+        </xsd:sequence>
+      </xsd:complexType>
+    </xsd:element>
+  </xsd:schema>
+  <xsd:schema xmlns:xsd="http://www.w3.org/2001/XMLSchema" xmlns:xs="http://www.w3.org/2001/XMLSchema" xmlns:dms="http://schemas.microsoft.com/office/2006/documentManagement/types" xmlns:pc="http://schemas.microsoft.com/office/infopath/2007/PartnerControls" targetNamespace="dd447142-1aa6-4a72-a007-63df8aaaa9f8" elementFormDefault="qualified">
+    <xsd:import namespace="http://schemas.microsoft.com/office/2006/documentManagement/types"/>
+    <xsd:import namespace="http://schemas.microsoft.com/office/infopath/2007/PartnerControls"/>
+    <xsd:element name="MediaServiceMetadata" ma:index="8" nillable="true" ma:displayName="MediaServiceMetadata" ma:hidden="true" ma:internalName="MediaServiceMetadata" ma:readOnly="true">
+      <xsd:simpleType>
+        <xsd:restriction base="dms:Note"/>
+      </xsd:simpleType>
+    </xsd:element>
+    <xsd:element name="MediaServiceFastMetadata" ma:index="9" nillable="true" ma:displayName="MediaServiceFastMetadata" ma:hidden="true" ma:internalName="MediaServiceFastMetadata" ma:readOnly="true">
+      <xsd:simpleType>
+        <xsd:restriction base="dms:Note"/>
+      </xsd:simpleType>
+    </xsd:element>
+    <xsd:element name="MediaServiceObjectDetectorVersions" ma:index="10" nillable="true" ma:displayName="MediaServiceObjectDetectorVersions" ma:hidden="true" ma:indexed="true" ma:internalName="MediaServiceObjectDetectorVersions" ma:readOnly="true">
+      <xsd:simpleType>
+        <xsd:restriction base="dms:Text"/>
+      </xsd:simpleType>
+    </xsd:element>
+    <xsd:element name="MediaServiceDateTaken" ma:index="13" nillable="true" ma:displayName="MediaServiceDateTaken" ma:hidden="true" ma:indexed="true" ma:internalName="MediaServiceDateTaken" ma:readOnly="true">
+      <xsd:simpleType>
+        <xsd:restriction base="dms:Text"/>
+      </xsd:simpleType>
+    </xsd:element>
+    <xsd:element name="MediaServiceGenerationTime" ma:index="14" nillable="true" ma:displayName="MediaServiceGenerationTime" ma:hidden="true" ma:internalName="MediaServiceGenerationTime" ma:readOnly="true">
+      <xsd:simpleType>
+        <xsd:restriction base="dms:Text"/>
+      </xsd:simpleType>
+    </xsd:element>
+    <xsd:element name="MediaServiceEventHashCode" ma:index="15" nillable="true" ma:displayName="MediaServiceEventHashCode" ma:hidden="true" ma:internalName="MediaServiceEventHashCode" ma:readOnly="true">
+      <xsd:simpleType>
+        <xsd:restriction base="dms:Text"/>
+      </xsd:simpleType>
+    </xsd:element>
+    <xsd:element name="MediaLengthInSeconds" ma:index="16" nillable="true" ma:displayName="MediaLengthInSeconds" ma:hidden="true" ma:internalName="MediaLengthInSeconds" ma:readOnly="true">
+      <xsd:simpleType>
+        <xsd:restriction base="dms:Unknown"/>
+      </xsd:simpleType>
+    </xsd:element>
+    <xsd:element name="lcf76f155ced4ddcb4097134ff3c332f" ma:index="18" nillable="true" ma:taxonomy="true" ma:internalName="lcf76f155ced4ddcb4097134ff3c332f" ma:taxonomyFieldName="MediaServiceImageTags" ma:displayName="Bildmarkierungen" ma:readOnly="false" ma:fieldId="{5cf76f15-5ced-4ddc-b409-7134ff3c332f}" ma:taxonomyMulti="true" ma:sspId="0aed264e-563a-469a-8ebe-271e849ec10c" ma:termSetId="09814cd3-568e-fe90-9814-8d621ff8fb84" ma:anchorId="fba54fb3-c3e1-fe81-a776-ca4b69148c4d" ma:open="true" ma:isKeyword="false">
+      <xsd:complexType>
+        <xsd:sequence>
+          <xsd:element ref="pc:Terms" minOccurs="0" maxOccurs="1"/>
+        </xsd:sequence>
+      </xsd:complexType>
+    </xsd:element>
+    <xsd:element name="MediaServiceOCR" ma:index="20" nillable="true" ma:displayName="Extracted Text" ma:internalName="MediaServiceOCR" ma:readOnly="true">
+      <xsd:simpleType>
+        <xsd:restriction base="dms:Note">
+          <xsd:maxLength value="255"/>
+        </xsd:restriction>
+      </xsd:simpleType>
+    </xsd:element>
+    <xsd:element name="MediaServiceSearchProperties" ma:index="21" nillable="true" ma:displayName="MediaServiceSearchProperties" ma:hidden="true" ma:internalName="MediaServiceSearchProperties" ma:readOnly="true">
+      <xsd:simpleType>
+        <xsd:restriction base="dms:Note"/>
+      </xsd:simpleType>
+    </xsd:element>
+    <xsd:element name="MediaServiceLocation" ma:index="22" nillable="true" ma:displayName="Location" ma:indexed="true" ma:internalName="MediaServiceLocation" ma:readOnly="true">
+      <xsd:simpleType>
+        <xsd:restriction base="dms:Text"/>
+      </xsd:simpleType>
+    </xsd:element>
+    <xsd:element name="MediaServiceBillingMetadata" ma:index="23" nillable="true" ma:displayName="MediaServiceBillingMetadata" ma:hidden="true" ma:internalName="MediaServiceBillingMetadata" ma:readOnly="true">
+      <xsd:simpleType>
+        <xsd:restriction base="dms:Note"/>
+      </xsd:simpleType>
+    </xsd:element>
+  </xsd:schema>
+  <xsd:schema xmlns:xsd="http://www.w3.org/2001/XMLSchema" xmlns:xs="http://www.w3.org/2001/XMLSchema" xmlns:dms="http://schemas.microsoft.com/office/2006/documentManagement/types" xmlns:pc="http://schemas.microsoft.com/office/infopath/2007/PartnerControls" targetNamespace="c945b90e-fc88-49af-b28e-2201e397b9a1" elementFormDefault="qualified">
+    <xsd:import namespace="http://schemas.microsoft.com/office/2006/documentManagement/types"/>
+    <xsd:import namespace="http://schemas.microsoft.com/office/infopath/2007/PartnerControls"/>
+    <xsd:element name="SharedWithUsers" ma:index="11" nillable="true" ma:displayName="Freigegeben für" ma:internalName="SharedWithUsers" ma:readOnly="true">
+      <xsd:complexType>
+        <xsd:complexContent>
+          <xsd:extension base="dms:UserMulti">
+            <xsd:sequence>
+              <xsd:element name="UserInfo" minOccurs="0" maxOccurs="unbounded">
+                <xsd:complexType>
+                  <xsd:sequence>
+                    <xsd:element name="DisplayName" type="xsd:string" minOccurs="0"/>
+                    <xsd:element name="AccountId" type="dms:UserId" minOccurs="0" nillable="true"/>
+                    <xsd:element name="AccountType" type="xsd:string" minOccurs="0"/>
+                  </xsd:sequence>
+                </xsd:complexType>
+              </xsd:element>
+            </xsd:sequence>
+          </xsd:extension>
+        </xsd:complexContent>
+      </xsd:complexType>
+    </xsd:element>
+    <xsd:element name="SharedWithDetails" ma:index="12" nillable="true" ma:displayName="Freigegeben für - Details" ma:internalName="SharedWithDetails" ma:readOnly="true">
+      <xsd:simpleType>
+        <xsd:restriction base="dms:Note">
+          <xsd:maxLength value="255"/>
+        </xsd:restriction>
+      </xsd:simpleType>
+    </xsd:element>
+    <xsd:element name="TaxCatchAll" ma:index="19" nillable="true" ma:displayName="Taxonomy Catch All Column" ma:hidden="true" ma:list="{12ee92ea-e074-4350-ac3b-5cf132dea3f3}" ma:internalName="TaxCatchAll" ma:showField="CatchAllData" ma:web="c945b90e-fc88-49af-b28e-2201e397b9a1">
+      <xsd:complexType>
+        <xsd:complexContent>
+          <xsd:extension base="dms:MultiChoiceLookup">
+            <xsd:sequence>
+              <xsd:element name="Value" type="dms:Lookup" maxOccurs="unbounded" minOccurs="0" nillable="true"/>
+            </xsd:sequence>
+          </xsd:extension>
+        </xsd:complexContent>
+      </xsd:complexType>
+    </xsd:element>
+  </xsd:schema>
+  <xsd:schema xmlns="http://schemas.openxmlformats.org/package/2006/metadata/core-properties" xmlns:xsd="http://www.w3.org/2001/XMLSchema" xmlns:xsi="http://www.w3.org/2001/XMLSchema-instance" xmlns:dc="http://purl.org/dc/elements/1.1/" xmlns:dcterms="http://purl.org/dc/terms/" xmlns:odoc="http://schemas.microsoft.com/internal/obd" targetNamespace="http://schemas.openxmlformats.org/package/2006/metadata/core-properties" elementFormDefault="qualified" attributeFormDefault="unqualified" blockDefault="#all">
+    <xsd:import namespace="http://purl.org/dc/elements/1.1/" schemaLocation="http://dublincore.org/schemas/xmls/qdc/2003/04/02/dc.xsd"/>
+    <xsd:import namespace="http://purl.org/dc/terms/" schemaLocation="http://dublincore.org/schemas/xmls/qdc/2003/04/02/dcterms.xsd"/>
+    <xsd:element name="coreProperties" type="CT_coreProperties"/>
+    <xsd:complexType name="CT_coreProperties">
+      <xsd:all>
+        <xsd:element ref="dc:creator" minOccurs="0" maxOccurs="1"/>
+        <xsd:element ref="dcterms:created" minOccurs="0" maxOccurs="1"/>
+        <xsd:element ref="dc:identifier" minOccurs="0" maxOccurs="1"/>
+        <xsd:element name="contentType" minOccurs="0" maxOccurs="1" type="xsd:string" ma:index="0" ma:displayName="Inhaltstyp"/>
+        <xsd:element ref="dc:title" minOccurs="0" maxOccurs="1" ma:index="4" ma:displayName="Titel"/>
+        <xsd:element ref="dc:subject" minOccurs="0" maxOccurs="1"/>
+        <xsd:element ref="dc:description" minOccurs="0" maxOccurs="1"/>
+        <xsd:element name="keywords" minOccurs="0" maxOccurs="1" type="xsd:string"/>
+        <xsd:element ref="dc:language" minOccurs="0" maxOccurs="1"/>
+        <xsd:element name="category" minOccurs="0" maxOccurs="1" type="xsd:string"/>
+        <xsd:element name="version" minOccurs="0" maxOccurs="1" type="xsd:string"/>
+        <xsd:element name="revision" minOccurs="0" maxOccurs="1" type="xsd:string">
+          <xsd:annotation>
+            <xsd:documentation>
+                        This value indicates the number of saves or revisions. The application is responsible for updating this value after each revision.
+                    </xsd:documentation>
+          </xsd:annotation>
+        </xsd:element>
+        <xsd:element name="lastModifiedBy" minOccurs="0" maxOccurs="1" type="xsd:string"/>
+        <xsd:element ref="dcterms:modified" minOccurs="0" maxOccurs="1"/>
+        <xsd:element name="contentStatus" minOccurs="0" maxOccurs="1" type="xsd:string"/>
+      </xsd:all>
+    </xsd:complexType>
+  </xsd:schema>
+  <xs:schema xmlns:pc="http://schemas.microsoft.com/office/infopath/2007/PartnerControls" xmlns:xs="http://www.w3.org/2001/XMLSchema" targetNamespace="http://schemas.microsoft.com/office/infopath/2007/PartnerControls" elementFormDefault="qualified" attributeFormDefault="unqualified">
+    <xs:element name="Person">
+      <xs:complexType>
+        <xs:sequence>
+          <xs:element ref="pc:DisplayName" minOccurs="0"/>
+          <xs:element ref="pc:AccountId" minOccurs="0"/>
+          <xs:element ref="pc:AccountType" minOccurs="0"/>
+        </xs:sequence>
+      </xs:complexType>
+    </xs:element>
+    <xs:element name="DisplayName" type="xs:string"/>
+    <xs:element name="AccountId" type="xs:string"/>
+    <xs:element name="AccountType" type="xs:string"/>
+    <xs:element name="BDCAssociatedEntity">
+      <xs:complexType>
+        <xs:sequence>
+          <xs:element ref="pc:BDCEntity" minOccurs="0" maxOccurs="unbounded"/>
+        </xs:sequence>
+        <xs:attribute ref="pc:EntityNamespace"/>
+        <xs:attribute ref="pc:EntityName"/>
+        <xs:attribute ref="pc:SystemInstanceName"/>
+        <xs:attribute ref="pc:AssociationName"/>
+      </xs:complexType>
+    </xs:element>
+    <xs:attribute name="EntityNamespace" type="xs:string"/>
+    <xs:attribute name="EntityName" type="xs:string"/>
+    <xs:attribute name="SystemInstanceName" type="xs:string"/>
+    <xs:attribute name="AssociationName" type="xs:string"/>
+    <xs:element name="BDCEntity">
+      <xs:complexType>
+        <xs:sequence>
+          <xs:element ref="pc:EntityDisplayName" minOccurs="0"/>
+          <xs:element ref="pc:EntityInstanceReference" minOccurs="0"/>
+          <xs:element ref="pc:EntityId1" minOccurs="0"/>
+          <xs:element ref="pc:EntityId2" minOccurs="0"/>
+          <xs:element ref="pc:EntityId3" minOccurs="0"/>
+          <xs:element ref="pc:EntityId4" minOccurs="0"/>
+          <xs:element ref="pc:EntityId5" minOccurs="0"/>
+        </xs:sequence>
+      </xs:complexType>
+    </xs:element>
+    <xs:element name="EntityDisplayName" type="xs:string"/>
+    <xs:element name="EntityInstanceReference" type="xs:string"/>
+    <xs:element name="EntityId1" type="xs:string"/>
+    <xs:element name="EntityId2" type="xs:string"/>
+    <xs:element name="EntityId3" type="xs:string"/>
+    <xs:element name="EntityId4" type="xs:string"/>
+    <xs:element name="EntityId5" type="xs:string"/>
+    <xs:element name="Terms">
+      <xs:complexType>
+        <xs:sequence>
+          <xs:element ref="pc:TermInfo" minOccurs="0" maxOccurs="unbounded"/>
+        </xs:sequence>
+      </xs:complexType>
+    </xs:element>
+    <xs:element name="TermInfo">
+      <xs:complexType>
+        <xs:sequence>
+          <xs:element ref="pc:TermName" minOccurs="0"/>
+          <xs:element ref="pc:TermId" minOccurs="0"/>
+        </xs:sequence>
+      </xs:complexType>
+    </xs:element>
+    <xs:element name="TermName" type="xs:string"/>
+    <xs:element name="TermId" type="xs:string"/>
+  </xs:schema>
+</ct:contentTypeSchema>
+</file>
+
+<file path=customXml/item2.xml><?xml version="1.0" encoding="utf-8"?>
+<p:properties xmlns:p="http://schemas.microsoft.com/office/2006/metadata/properties" xmlns:xsi="http://www.w3.org/2001/XMLSchema-instance" xmlns:pc="http://schemas.microsoft.com/office/infopath/2007/PartnerControls">
+  <documentManagement>
+    <TaxCatchAll xmlns="c945b90e-fc88-49af-b28e-2201e397b9a1" xsi:nil="true"/>
+    <lcf76f155ced4ddcb4097134ff3c332f xmlns="dd447142-1aa6-4a72-a007-63df8aaaa9f8">
+      <Terms xmlns="http://schemas.microsoft.com/office/infopath/2007/PartnerControls"/>
+    </lcf76f155ced4ddcb4097134ff3c332f>
+  </documentManagement>
+</p:properties>
+</file>
+
+<file path=customXml/item3.xml><?xml version="1.0" encoding="utf-8"?>
+<?mso-contentType ?>
+<FormTemplates xmlns="http://schemas.microsoft.com/sharepoint/v3/contenttype/forms">
+  <Display>DocumentLibraryForm</Display>
+  <Edit>DocumentLibraryForm</Edit>
+  <New>DocumentLibraryForm</New>
+</FormTemplates>
+</file>
+
+<file path=customXml/itemProps1.xml><?xml version="1.0" encoding="utf-8"?>
+<ds:datastoreItem xmlns:ds="http://schemas.openxmlformats.org/officeDocument/2006/customXml" ds:itemID="{71414F84-7B1D-4C48-B61C-8D1C718A9B7A}">
+  <ds:schemaRefs>
+    <ds:schemaRef ds:uri="http://schemas.microsoft.com/office/2006/metadata/contentType"/>
+    <ds:schemaRef ds:uri="http://schemas.microsoft.com/office/2006/metadata/properties/metaAttributes"/>
+    <ds:schemaRef ds:uri="http://www.w3.org/2001/XMLSchema"/>
+    <ds:schemaRef ds:uri="http://schemas.microsoft.com/office/2006/metadata/properties"/>
+    <ds:schemaRef ds:uri="dd447142-1aa6-4a72-a007-63df8aaaa9f8"/>
+    <ds:schemaRef ds:uri="c945b90e-fc88-49af-b28e-2201e397b9a1"/>
+    <ds:schemaRef ds:uri="http://schemas.microsoft.com/office/2006/documentManagement/types"/>
+    <ds:schemaRef ds:uri="http://schemas.microsoft.com/office/infopath/2007/PartnerControls"/>
+    <ds:schemaRef ds:uri="http://schemas.openxmlformats.org/package/2006/metadata/core-properties"/>
+    <ds:schemaRef ds:uri="http://purl.org/dc/elements/1.1/"/>
+    <ds:schemaRef ds:uri="http://purl.org/dc/terms/"/>
+    <ds:schemaRef ds:uri="http://schemas.microsoft.com/internal/obd"/>
+  </ds:schemaRefs>
+</ds:datastoreItem>
+</file>
+
+<file path=customXml/itemProps2.xml><?xml version="1.0" encoding="utf-8"?>
+<ds:datastoreItem xmlns:ds="http://schemas.openxmlformats.org/officeDocument/2006/customXml" ds:itemID="{E3DB60AB-7010-4D77-9E5D-4F2FA5EACCEB}">
+  <ds:schemaRefs>
+    <ds:schemaRef ds:uri="http://purl.org/dc/elements/1.1/"/>
+    <ds:schemaRef ds:uri="c945b90e-fc88-49af-b28e-2201e397b9a1"/>
+    <ds:schemaRef ds:uri="http://schemas.microsoft.com/office/2006/metadata/properties"/>
+    <ds:schemaRef ds:uri="http://www.w3.org/XML/1998/namespace"/>
+    <ds:schemaRef ds:uri="http://schemas.microsoft.com/office/infopath/2007/PartnerControls"/>
+    <ds:schemaRef ds:uri="dd447142-1aa6-4a72-a007-63df8aaaa9f8"/>
+    <ds:schemaRef ds:uri="http://schemas.openxmlformats.org/package/2006/metadata/core-properties"/>
+    <ds:schemaRef ds:uri="http://purl.org/dc/terms/"/>
+    <ds:schemaRef ds:uri="http://schemas.microsoft.com/office/2006/documentManagement/types"/>
+    <ds:schemaRef ds:uri="http://purl.org/dc/dcmitype/"/>
+  </ds:schemaRefs>
+</ds:datastoreItem>
+</file>
+
+<file path=customXml/itemProps3.xml><?xml version="1.0" encoding="utf-8"?>
+<ds:datastoreItem xmlns:ds="http://schemas.openxmlformats.org/officeDocument/2006/customXml" ds:itemID="{C8FC5DC7-0137-44BD-8C9E-29D7D3190881}">
+  <ds:schemaRefs>
+    <ds:schemaRef ds:uri="http://schemas.microsoft.com/sharepoint/v3/contenttype/forms"/>
+  </ds:schemaRefs>
+</ds:datastoreItem>
 </file>
--- a/public/program-kz.pptx
+++ b/public/program-kz.pptx
@@ -143,7 +143,7 @@
           <a:p>
             <a:fld id="{0C391B6F-BBFA-438A-9286-1FC62C3499A0}" type="datetimeFigureOut">
               <a:rPr lang="ru-RU" smtClean="0"/>
-              <a:t>01.04.2026</a:t>
+              <a:t>23.04.2026</a:t>
             </a:fld>
             <a:endParaRPr lang="ru-RU"/>
           </a:p>
@@ -387,7 +387,7 @@
           <a:p>
             <a:fld id="{1D8BD707-D9CF-40AE-B4C6-C98DA3205C09}" type="datetimeFigureOut">
               <a:rPr lang="en-US"/>
-              <a:t>4/1/2026</a:t>
+              <a:t>4/23/2026</a:t>
             </a:fld>
             <a:endParaRPr lang="en-US"/>
           </a:p>
@@ -830,7 +830,7 @@
           <a:p>
             <a:fld id="{1D8BD707-D9CF-40AE-B4C6-C98DA3205C09}" type="datetimeFigureOut">
               <a:rPr lang="en-US"/>
-              <a:t>4/1/2026</a:t>
+              <a:t>4/23/2026</a:t>
             </a:fld>
             <a:endParaRPr lang="en-US"/>
           </a:p>
@@ -1044,7 +1044,7 @@
           <a:p>
             <a:fld id="{1D8BD707-D9CF-40AE-B4C6-C98DA3205C09}" type="datetimeFigureOut">
               <a:rPr lang="en-US"/>
-              <a:t>4/1/2026</a:t>
+              <a:t>4/23/2026</a:t>
             </a:fld>
             <a:endParaRPr lang="en-US"/>
           </a:p>
@@ -1192,7 +1192,7 @@
           <a:p>
             <a:fld id="{1D8BD707-D9CF-40AE-B4C6-C98DA3205C09}" type="datetimeFigureOut">
               <a:rPr lang="en-US"/>
-              <a:t>4/1/2026</a:t>
+              <a:t>4/23/2026</a:t>
             </a:fld>
             <a:endParaRPr lang="en-US"/>
           </a:p>
@@ -1391,7 +1391,7 @@
           <a:p>
             <a:fld id="{1D8BD707-D9CF-40AE-B4C6-C98DA3205C09}" type="datetimeFigureOut">
               <a:rPr lang="en-US"/>
-              <a:t>4/1/2026</a:t>
+              <a:t>4/23/2026</a:t>
             </a:fld>
             <a:endParaRPr lang="en-US"/>
           </a:p>
@@ -1614,7 +1614,7 @@
           <a:p>
             <a:fld id="{1D8BD707-D9CF-40AE-B4C6-C98DA3205C09}" type="datetimeFigureOut">
               <a:rPr lang="en-US"/>
-              <a:t>4/1/2026</a:t>
+              <a:t>4/23/2026</a:t>
             </a:fld>
             <a:endParaRPr lang="en-US"/>
           </a:p>
@@ -5081,7 +5081,7 @@
               </a:spcBef>
             </a:pPr>
             <a:r>
-              <a:rPr lang="kk-KZ" sz="1100" u="sng" spc="-10" noProof="0" dirty="0">
+              <a:rPr lang="kk-KZ" sz="1100" u="sng" spc="-10" dirty="0">
                 <a:solidFill>
                   <a:srgbClr val="002060"/>
                 </a:solidFill>
@@ -5093,20 +5093,10 @@
                 <a:latin typeface="Arial" panose="020B0604020202020204" pitchFamily="34" charset="0"/>
                 <a:cs typeface="Arial" panose="020B0604020202020204" pitchFamily="34" charset="0"/>
               </a:rPr>
-              <a:t>Kazlogistics Association қауымдастығының өкілі</a:t>
-            </a:r>
-          </a:p>
-          <a:p>
-            <a:pPr marL="358775" algn="l" rtl="0">
-              <a:lnSpc>
-                <a:spcPct val="100000"/>
-              </a:lnSpc>
-              <a:spcBef>
-                <a:spcPts val="625"/>
-              </a:spcBef>
-            </a:pPr>
-            <a:r>
-              <a:rPr lang="kk-KZ" sz="1100" u="sng" spc="-10" noProof="0" dirty="0">
+              <a:t>«</a:t>
+            </a:r>
+            <a:r>
+              <a:rPr lang="de-DE" sz="1100" u="sng" spc="-10" dirty="0">
                 <a:solidFill>
                   <a:srgbClr val="002060"/>
                 </a:solidFill>
@@ -5118,20 +5108,10 @@
                 <a:latin typeface="Arial" panose="020B0604020202020204" pitchFamily="34" charset="0"/>
                 <a:cs typeface="Arial" panose="020B0604020202020204" pitchFamily="34" charset="0"/>
               </a:rPr>
-              <a:t>Қазақстандық және неміс компаниялары мен ұйымдарының өкілдері (Kazakhstan Temir Zholy, Eastcomtrans, AsstrA, Gebrüder Weiss және т.б. )</a:t>
-            </a:r>
-          </a:p>
-          <a:p>
-            <a:pPr marL="12700" algn="l" rtl="0">
-              <a:lnSpc>
-                <a:spcPct val="100000"/>
-              </a:lnSpc>
-              <a:spcBef>
-                <a:spcPts val="625"/>
-              </a:spcBef>
-            </a:pPr>
-            <a:r>
-              <a:rPr lang="kk-KZ" sz="1100" u="sng" spc="-10" noProof="0" dirty="0">
+              <a:t>KAZLOGISTICS»</a:t>
+            </a:r>
+            <a:r>
+              <a:rPr lang="ru-RU" sz="1100" u="sng" spc="-10" dirty="0">
                 <a:solidFill>
                   <a:srgbClr val="002060"/>
                 </a:solidFill>
@@ -5143,10 +5123,10 @@
                 <a:latin typeface="Arial" panose="020B0604020202020204" pitchFamily="34" charset="0"/>
                 <a:cs typeface="Arial" panose="020B0604020202020204" pitchFamily="34" charset="0"/>
               </a:rPr>
-              <a:t>13:00 – 14:30 </a:t>
-            </a:r>
-            <a:r>
-              <a:rPr lang="kk-KZ" sz="1100" b="1" u="sng" spc="-10" noProof="0" dirty="0">
+              <a:t> </a:t>
+            </a:r>
+            <a:r>
+              <a:rPr lang="kk-KZ" sz="1100" u="sng" spc="-10" dirty="0">
                 <a:solidFill>
                   <a:srgbClr val="002060"/>
                 </a:solidFill>
@@ -5158,18 +5138,8 @@
                 <a:latin typeface="Arial" panose="020B0604020202020204" pitchFamily="34" charset="0"/>
                 <a:cs typeface="Arial" panose="020B0604020202020204" pitchFamily="34" charset="0"/>
               </a:rPr>
-              <a:t>Түскі асқа үзіліс</a:t>
-            </a:r>
-          </a:p>
-          <a:p>
-            <a:pPr marL="12700" algn="l" rtl="0">
-              <a:lnSpc>
-                <a:spcPct val="100000"/>
-              </a:lnSpc>
-              <a:spcBef>
-                <a:spcPts val="625"/>
-              </a:spcBef>
-            </a:pPr>
+              <a:t>Қазақстан көлікшілер одағы </a:t>
+            </a:r>
             <a:r>
               <a:rPr lang="kk-KZ" sz="1100" u="sng" spc="-10" noProof="0" dirty="0">
                 <a:solidFill>
@@ -5183,10 +5153,20 @@
                 <a:latin typeface="Arial" panose="020B0604020202020204" pitchFamily="34" charset="0"/>
                 <a:cs typeface="Arial" panose="020B0604020202020204" pitchFamily="34" charset="0"/>
               </a:rPr>
-              <a:t>14:30 – 17:00 </a:t>
-            </a:r>
-            <a:r>
-              <a:rPr lang="kk-KZ" sz="1100" b="1" u="sng" spc="-10" noProof="0" dirty="0">
+              <a:t>өкілі</a:t>
+            </a:r>
+          </a:p>
+          <a:p>
+            <a:pPr marL="358775" algn="l" rtl="0">
+              <a:lnSpc>
+                <a:spcPct val="100000"/>
+              </a:lnSpc>
+              <a:spcBef>
+                <a:spcPts val="625"/>
+              </a:spcBef>
+            </a:pPr>
+            <a:r>
+              <a:rPr lang="kk-KZ" sz="1100" u="sng" spc="-10" noProof="0" dirty="0">
                 <a:solidFill>
                   <a:srgbClr val="002060"/>
                 </a:solidFill>
@@ -5198,7 +5178,7 @@
                 <a:latin typeface="Arial" panose="020B0604020202020204" pitchFamily="34" charset="0"/>
                 <a:cs typeface="Arial" panose="020B0604020202020204" pitchFamily="34" charset="0"/>
               </a:rPr>
-              <a:t>B2B кездесулер</a:t>
+              <a:t>Қазақстандық және неміс компаниялары мен ұйымдарының өкілдері (Kazakhstan Temir Zholy, Eastcomtrans, AsstrA, Gebrüder Weiss және т.б. )</a:t>
             </a:r>
           </a:p>
           <a:p>
@@ -5223,20 +5203,10 @@
                 <a:latin typeface="Arial" panose="020B0604020202020204" pitchFamily="34" charset="0"/>
                 <a:cs typeface="Arial" panose="020B0604020202020204" pitchFamily="34" charset="0"/>
               </a:rPr>
-              <a:t>Әлеуетті серіктестерді табуға және бірлескен ғылыми, білім беру және бизнес-жобаларды талқылауға бағытталған мақсатты іскерлік кездесулер сериясы. Қатысушыларға ыңғайлы болу үшін форумның ресми сайтында қатысушылар туралы ақпарат және кездесулерді брондау жүйесі қолжетімді болады.</a:t>
-            </a:r>
-          </a:p>
-          <a:p>
-            <a:pPr marL="12700" algn="l" rtl="0">
-              <a:lnSpc>
-                <a:spcPct val="100000"/>
-              </a:lnSpc>
-              <a:spcBef>
-                <a:spcPts val="625"/>
-              </a:spcBef>
-            </a:pPr>
-            <a:r>
-              <a:rPr lang="kk-KZ" sz="1100" u="sng" spc="-10" noProof="0" dirty="0">
+              <a:t>13:00 – 14:30 </a:t>
+            </a:r>
+            <a:r>
+              <a:rPr lang="kk-KZ" sz="1100" b="1" u="sng" spc="-10" noProof="0" dirty="0">
                 <a:solidFill>
                   <a:srgbClr val="002060"/>
                 </a:solidFill>
@@ -5248,10 +5218,20 @@
                 <a:latin typeface="Arial" panose="020B0604020202020204" pitchFamily="34" charset="0"/>
                 <a:cs typeface="Arial" panose="020B0604020202020204" pitchFamily="34" charset="0"/>
               </a:rPr>
-              <a:t>17:00 </a:t>
-            </a:r>
-            <a:r>
-              <a:rPr lang="kk-KZ" sz="1100" b="1" u="sng" spc="-10" noProof="0" dirty="0">
+              <a:t>Түскі асқа үзіліс</a:t>
+            </a:r>
+          </a:p>
+          <a:p>
+            <a:pPr marL="12700" algn="l" rtl="0">
+              <a:lnSpc>
+                <a:spcPct val="100000"/>
+              </a:lnSpc>
+              <a:spcBef>
+                <a:spcPts val="625"/>
+              </a:spcBef>
+            </a:pPr>
+            <a:r>
+              <a:rPr lang="kk-KZ" sz="1100" u="sng" spc="-10" noProof="0" dirty="0">
                 <a:solidFill>
                   <a:srgbClr val="002060"/>
                 </a:solidFill>
@@ -5263,6 +5243,86 @@
                 <a:latin typeface="Arial" panose="020B0604020202020204" pitchFamily="34" charset="0"/>
                 <a:cs typeface="Arial" panose="020B0604020202020204" pitchFamily="34" charset="0"/>
               </a:rPr>
+              <a:t>14:30 – 17:00 </a:t>
+            </a:r>
+            <a:r>
+              <a:rPr lang="kk-KZ" sz="1100" b="1" u="sng" spc="-10" noProof="0" dirty="0">
+                <a:solidFill>
+                  <a:srgbClr val="002060"/>
+                </a:solidFill>
+                <a:uFill>
+                  <a:solidFill>
+                    <a:srgbClr val="39A0D2"/>
+                  </a:solidFill>
+                </a:uFill>
+                <a:latin typeface="Arial" panose="020B0604020202020204" pitchFamily="34" charset="0"/>
+                <a:cs typeface="Arial" panose="020B0604020202020204" pitchFamily="34" charset="0"/>
+              </a:rPr>
+              <a:t>B2B кездесулер</a:t>
+            </a:r>
+          </a:p>
+          <a:p>
+            <a:pPr marL="12700" algn="l" rtl="0">
+              <a:lnSpc>
+                <a:spcPct val="100000"/>
+              </a:lnSpc>
+              <a:spcBef>
+                <a:spcPts val="625"/>
+              </a:spcBef>
+            </a:pPr>
+            <a:r>
+              <a:rPr lang="kk-KZ" sz="1100" u="sng" spc="-10" noProof="0" dirty="0">
+                <a:solidFill>
+                  <a:srgbClr val="002060"/>
+                </a:solidFill>
+                <a:uFill>
+                  <a:solidFill>
+                    <a:srgbClr val="39A0D2"/>
+                  </a:solidFill>
+                </a:uFill>
+                <a:latin typeface="Arial" panose="020B0604020202020204" pitchFamily="34" charset="0"/>
+                <a:cs typeface="Arial" panose="020B0604020202020204" pitchFamily="34" charset="0"/>
+              </a:rPr>
+              <a:t>Әлеуетті серіктестерді табуға және бірлескен ғылыми, білім беру және бизнес-жобаларды талқылауға бағытталған мақсатты іскерлік кездесулер сериясы. Қатысушыларға ыңғайлы болу үшін форумның ресми сайтында қатысушылар туралы ақпарат және кездесулерді брондау жүйесі қолжетімді болады.</a:t>
+            </a:r>
+          </a:p>
+          <a:p>
+            <a:pPr marL="12700" algn="l" rtl="0">
+              <a:lnSpc>
+                <a:spcPct val="100000"/>
+              </a:lnSpc>
+              <a:spcBef>
+                <a:spcPts val="625"/>
+              </a:spcBef>
+            </a:pPr>
+            <a:r>
+              <a:rPr lang="kk-KZ" sz="1100" u="sng" spc="-10" noProof="0" dirty="0">
+                <a:solidFill>
+                  <a:srgbClr val="002060"/>
+                </a:solidFill>
+                <a:uFill>
+                  <a:solidFill>
+                    <a:srgbClr val="39A0D2"/>
+                  </a:solidFill>
+                </a:uFill>
+                <a:latin typeface="Arial" panose="020B0604020202020204" pitchFamily="34" charset="0"/>
+                <a:cs typeface="Arial" panose="020B0604020202020204" pitchFamily="34" charset="0"/>
+              </a:rPr>
+              <a:t>17:00 </a:t>
+            </a:r>
+            <a:r>
+              <a:rPr lang="kk-KZ" sz="1100" b="1" u="sng" spc="-10" noProof="0" dirty="0">
+                <a:solidFill>
+                  <a:srgbClr val="002060"/>
+                </a:solidFill>
+                <a:uFill>
+                  <a:solidFill>
+                    <a:srgbClr val="39A0D2"/>
+                  </a:solidFill>
+                </a:uFill>
+                <a:latin typeface="Arial" panose="020B0604020202020204" pitchFamily="34" charset="0"/>
+                <a:cs typeface="Arial" panose="020B0604020202020204" pitchFamily="34" charset="0"/>
+              </a:rPr>
               <a:t>Форумның жабылуы</a:t>
             </a:r>
           </a:p>
@@ -5310,25 +5370,7 @@
                 <a:latin typeface="Arial" panose="020B0604020202020204" pitchFamily="34" charset="0"/>
                 <a:cs typeface="Arial" panose="020B0604020202020204" pitchFamily="34" charset="0"/>
               </a:rPr>
-              <a:t>Кешкі </a:t>
-            </a:r>
-            <a:r>
-              <a:rPr lang="kk-KZ" sz="1100" b="1" u="sng" spc="-10" noProof="0" dirty="0">
-                <a:solidFill>
-                  <a:srgbClr val="002060"/>
-                </a:solidFill>
-                <a:highlight>
-                  <a:srgbClr val="FFFF00"/>
-                </a:highlight>
-                <a:uFill>
-                  <a:solidFill>
-                    <a:srgbClr val="39A0D2"/>
-                  </a:solidFill>
-                </a:uFill>
-                <a:latin typeface="Arial" panose="020B0604020202020204" pitchFamily="34" charset="0"/>
-                <a:cs typeface="Arial" panose="020B0604020202020204" pitchFamily="34" charset="0"/>
-              </a:rPr>
-              <a:t>қабылдау </a:t>
+              <a:t>Кешкі қабылдау </a:t>
             </a:r>
           </a:p>
           <a:p>
@@ -6349,6 +6391,15 @@
 </file>
 
 <file path=customXml/item2.xml><?xml version="1.0" encoding="utf-8"?>
+<?mso-contentType ?>
+<FormTemplates xmlns="http://schemas.microsoft.com/sharepoint/v3/contenttype/forms">
+  <Display>DocumentLibraryForm</Display>
+  <Edit>DocumentLibraryForm</Edit>
+  <New>DocumentLibraryForm</New>
+</FormTemplates>
+</file>
+
+<file path=customXml/item3.xml><?xml version="1.0" encoding="utf-8"?>
 <p:properties xmlns:p="http://schemas.microsoft.com/office/2006/metadata/properties" xmlns:xsi="http://www.w3.org/2001/XMLSchema-instance" xmlns:pc="http://schemas.microsoft.com/office/infopath/2007/PartnerControls">
   <documentManagement>
     <TaxCatchAll xmlns="c945b90e-fc88-49af-b28e-2201e397b9a1" xsi:nil="true"/>
@@ -6357,15 +6408,6 @@
     </lcf76f155ced4ddcb4097134ff3c332f>
   </documentManagement>
 </p:properties>
-</file>
-
-<file path=customXml/item3.xml><?xml version="1.0" encoding="utf-8"?>
-<?mso-contentType ?>
-<FormTemplates xmlns="http://schemas.microsoft.com/sharepoint/v3/contenttype/forms">
-  <Display>DocumentLibraryForm</Display>
-  <Edit>DocumentLibraryForm</Edit>
-  <New>DocumentLibraryForm</New>
-</FormTemplates>
 </file>
 
 <file path=customXml/itemProps1.xml><?xml version="1.0" encoding="utf-8"?>
@@ -6388,6 +6430,14 @@
 </file>
 
 <file path=customXml/itemProps2.xml><?xml version="1.0" encoding="utf-8"?>
+<ds:datastoreItem xmlns:ds="http://schemas.openxmlformats.org/officeDocument/2006/customXml" ds:itemID="{C8FC5DC7-0137-44BD-8C9E-29D7D3190881}">
+  <ds:schemaRefs>
+    <ds:schemaRef ds:uri="http://schemas.microsoft.com/sharepoint/v3/contenttype/forms"/>
+  </ds:schemaRefs>
+</ds:datastoreItem>
+</file>
+
+<file path=customXml/itemProps3.xml><?xml version="1.0" encoding="utf-8"?>
 <ds:datastoreItem xmlns:ds="http://schemas.openxmlformats.org/officeDocument/2006/customXml" ds:itemID="{E3DB60AB-7010-4D77-9E5D-4F2FA5EACCEB}">
   <ds:schemaRefs>
     <ds:schemaRef ds:uri="http://purl.org/dc/elements/1.1/"/>
@@ -6402,12 +6452,4 @@
     <ds:schemaRef ds:uri="http://purl.org/dc/dcmitype/"/>
   </ds:schemaRefs>
 </ds:datastoreItem>
-</file>
-
-<file path=customXml/itemProps3.xml><?xml version="1.0" encoding="utf-8"?>
-<ds:datastoreItem xmlns:ds="http://schemas.openxmlformats.org/officeDocument/2006/customXml" ds:itemID="{C8FC5DC7-0137-44BD-8C9E-29D7D3190881}">
-  <ds:schemaRefs>
-    <ds:schemaRef ds:uri="http://schemas.microsoft.com/sharepoint/v3/contenttype/forms"/>
-  </ds:schemaRefs>
-</ds:datastoreItem>
 </file>